--- a/presentation.pptx
+++ b/presentation.pptx
@@ -7982,7 +7982,7 @@
                 </a:solidFill>
                 <a:latin typeface="Calibri"/>
               </a:rPr>
-              <a:t>Let's Encrypt + systemd, не задели чужие сервисы на сервере</a:t>
+              <a:t>Let's Encrypt + systemd: автозапуск и автопродление сертификата</a:t>
             </a:r>
           </a:p>
         </p:txBody>
